--- a/dist/초5/영어/말하기와쓰기/초5_영어_말하기와쓰기_02_지난일말하기_학생용.pptx
+++ b/dist/초5/영어/말하기와쓰기/초5_영어_말하기와쓰기_02_지난일말하기_학생용.pptx
@@ -121,13 +121,13 @@
   <p:extLst>
     <p:ext uri="{521415D9-36F7-43E2-AB2F-B90AF26B5E84}">
       <p14:sectionLst xmlns:p14="http://schemas.microsoft.com/office/powerpoint/2010/main">
-        <p14:section name="도입" id="{daeae145-c795-92c8-8ea1-7de28d08ab59}">
+        <p14:section name="도입" id="{dba1c60c-f281-62e0-d20e-901a21d534ca}">
           <p14:sldIdLst>
             <p14:sldId id="256"/>
             <p14:sldId id="257"/>
           </p14:sldIdLst>
         </p14:section>
-        <p14:section name="개념" id="{0f81b5b9-1ac5-3544-e29d-cf574fa19c06}">
+        <p14:section name="개념" id="{5b428def-6632-59df-52bb-fc7ef55e1e96}">
           <p14:sldIdLst>
             <p14:sldId id="258"/>
             <p14:sldId id="259"/>
@@ -136,7 +136,7 @@
             <p14:sldId id="264"/>
           </p14:sldIdLst>
         </p14:section>
-        <p14:section name="연습" id="{9d0ef4b6-0949-6fa6-3a6a-a4e760dc47a2}">
+        <p14:section name="연습" id="{7bf476cc-b22f-eb64-fcd6-eb2f82fba371}">
           <p14:sldIdLst>
             <p14:sldId id="262"/>
             <p14:sldId id="263"/>
@@ -144,24 +144,24 @@
             <p14:sldId id="266"/>
           </p14:sldIdLst>
         </p14:section>
-        <p14:section name="개념" id="{05959de7-404d-7623-ead4-d39208343de5}">
+        <p14:section name="개념" id="{7e4536c3-6ddd-2b8e-4a38-3e8554b9edc9}">
           <p14:sldIdLst/>
         </p14:section>
-        <p14:section name="연습" id="{cb1459a7-217c-4f01-a7cb-99d74477abbf}">
+        <p14:section name="연습" id="{ed5d0b2a-0496-0e28-c6b7-bb563fc69f67}">
           <p14:sldIdLst/>
         </p14:section>
-        <p14:section name="확인" id="{2f83555c-3edc-828b-b417-01cdeebadfca}">
+        <p14:section name="확인" id="{108c34ca-a880-8648-3635-1bc99371b8ce}">
           <p14:sldIdLst>
             <p14:sldId id="267"/>
             <p14:sldId id="268"/>
           </p14:sldIdLst>
         </p14:section>
-        <p14:section name="정리" id="{a903af5c-f5ed-e052-4401-92f198e0d322}">
+        <p14:section name="정리" id="{f81248fa-f179-a233-a1a3-68ea6a5729c3}">
           <p14:sldIdLst>
             <p14:sldId id="269"/>
           </p14:sldIdLst>
         </p14:section>
-        <p14:section name="보충" id="{e6c9895c-cdac-0459-569a-2626c79acd2e}">
+        <p14:section name="보충" id="{b14f863d-fecd-75bf-d7c8-aa89bddcd4ef}">
           <p14:sldIdLst>
             <p14:sldId id="270"/>
           </p14:sldIdLst>
